--- a/courses/ai-native/sessions/s11.pptx
+++ b/courses/ai-native/sessions/s11.pptx
@@ -569,7 +569,7 @@
             <a:pPr lvl="0"/>
             <a:r>
               <a:rPr lang="ko-KR" sz="1200"/>
-              <a:t>"세션 03. 요구와 수용 기준"에서 미정으로 남긴 그 항목이 여기서 거두어진다. 일곱 세션을 건너 돌아온 것이다.</a:t>
+              <a:t>"세션 03. 요구와 수용 기준"에서 미정으로 남긴 그 항목이 여기서 거두어진다. 7세션을 건너 돌아온 것이다.</a:t>
             </a:r>
           </a:p>
         </p:txBody>
@@ -698,7 +698,7 @@
             <a:pPr lvl="0"/>
             <a:r>
               <a:rPr lang="ko-KR" sz="1200"/>
-              <a:t>표의 규칙은 교육용 결정이다. 실제 업무에서는 취소·재요청·보상 트랜잭션 중 무엇을 고를지 운영과 물류가 함께 정한다. 수강생에게 다른 답을 말하게 하고, 그 답이 아래 세 줄을 어떻게 바꾸는지 따라가게 한다.</a:t>
+              <a:t>표의 규칙은 교육용 결정이다. 실제 업무에서는 취소·재요청·보상 트랜잭션 중 무엇을 고를지 운영과 물류가 함께 정한다. 수강생에게 다른 답을 말하게 하고, 그 답이 아래 3줄을 어떻게 바꾸는지 따라가게 한다.</a:t>
             </a:r>
           </a:p>
           <a:p>
@@ -1540,7 +1540,7 @@
             <a:pPr lvl="0"/>
             <a:r>
               <a:rPr lang="ko-KR" sz="1200"/>
-              <a:t>지시문 원본은 code/s11/demo-results/prompt.txt다. "세션 08. 위임"의 위임 계약 네 가지(지시문·맥락·권한·종료 조건)가 모두 들어 있다.</a:t>
+              <a:t>지시문 원본은 code/s11/demo-results/prompt.txt다. "세션 08. 위임"의 위임 계약 4가지(지시문·맥락·권한·종료 조건)가 모두 들어 있다.</a:t>
             </a:r>
           </a:p>
           <a:p>
@@ -4865,7 +4865,7 @@
                       </a:r>
                     </a:p>
                   </a:txBody>
-                  <a:tcPr marL="6750" marR="6750" marT="6750" marB="0" anchor="ctr">
+                  <a:tcPr marL="6750" marR="6750" marT="6750" marB="6750" anchor="ctr">
                     <a:lnL>
                       <a:noFill/>
                     </a:lnL>
@@ -4927,7 +4927,7 @@
                       </a:r>
                     </a:p>
                   </a:txBody>
-                  <a:tcPr marL="6750" marR="6750" marT="6750" marB="0" anchor="ctr">
+                  <a:tcPr marL="6750" marR="6750" marT="6750" marB="6750" anchor="ctr">
                     <a:lnL w="9525" cap="flat" cmpd="sng" algn="ctr">
                       <a:solidFill>
                         <a:schemeClr val="bg1">
@@ -4999,7 +4999,7 @@
                       </a:r>
                     </a:p>
                   </a:txBody>
-                  <a:tcPr marL="81005" marR="6750" marT="6750" marB="0" anchor="ctr">
+                  <a:tcPr marL="81005" marR="6750" marT="6750" marB="6750" anchor="ctr">
                     <a:lnL>
                       <a:noFill/>
                     </a:lnL>
@@ -5053,7 +5053,7 @@
                       </a:r>
                     </a:p>
                   </a:txBody>
-                  <a:tcPr marL="81005" marR="6750" marT="6750" marB="0" anchor="ctr">
+                  <a:tcPr marL="81005" marR="6750" marT="6750" marB="6750" anchor="ctr">
                     <a:lnL>
                       <a:noFill/>
                     </a:lnL>
@@ -5111,7 +5111,7 @@
                       </a:r>
                     </a:p>
                   </a:txBody>
-                  <a:tcPr marL="81005" marR="6750" marT="6750" marB="0" anchor="ctr">
+                  <a:tcPr marL="81005" marR="6750" marT="6750" marB="6750" anchor="ctr">
                     <a:lnL>
                       <a:noFill/>
                     </a:lnL>
@@ -5165,7 +5165,7 @@
                       </a:r>
                     </a:p>
                   </a:txBody>
-                  <a:tcPr marL="81005" marR="6750" marT="6750" marB="0" anchor="ctr">
+                  <a:tcPr marL="81005" marR="6750" marT="6750" marB="6750" anchor="ctr">
                     <a:lnL>
                       <a:noFill/>
                     </a:lnL>
@@ -5223,7 +5223,7 @@
                       </a:r>
                     </a:p>
                   </a:txBody>
-                  <a:tcPr marL="81005" marR="6750" marT="6750" marB="0" anchor="ctr">
+                  <a:tcPr marL="81005" marR="6750" marT="6750" marB="6750" anchor="ctr">
                     <a:lnL>
                       <a:noFill/>
                     </a:lnL>
@@ -5277,7 +5277,7 @@
                       </a:r>
                     </a:p>
                   </a:txBody>
-                  <a:tcPr marL="81005" marR="6750" marT="6750" marB="0" anchor="ctr">
+                  <a:tcPr marL="81005" marR="6750" marT="6750" marB="6750" anchor="ctr">
                     <a:lnL>
                       <a:noFill/>
                     </a:lnL>
@@ -5335,7 +5335,7 @@
                       </a:r>
                     </a:p>
                   </a:txBody>
-                  <a:tcPr marL="81005" marR="6750" marT="6750" marB="0" anchor="ctr">
+                  <a:tcPr marL="81005" marR="6750" marT="6750" marB="6750" anchor="ctr">
                     <a:lnL>
                       <a:noFill/>
                     </a:lnL>
@@ -5389,7 +5389,7 @@
                       </a:r>
                     </a:p>
                   </a:txBody>
-                  <a:tcPr marL="81005" marR="6750" marT="6750" marB="0" anchor="ctr">
+                  <a:tcPr marL="81005" marR="6750" marT="6750" marB="6750" anchor="ctr">
                     <a:lnL>
                       <a:noFill/>
                     </a:lnL>
@@ -5930,7 +5930,7 @@
                       </a:r>
                     </a:p>
                   </a:txBody>
-                  <a:tcPr marL="6750" marR="6750" marT="6750" marB="0" anchor="ctr">
+                  <a:tcPr marL="6750" marR="6750" marT="6750" marB="6750" anchor="ctr">
                     <a:lnL>
                       <a:noFill/>
                     </a:lnL>
@@ -5992,7 +5992,7 @@
                       </a:r>
                     </a:p>
                   </a:txBody>
-                  <a:tcPr marL="6750" marR="6750" marT="6750" marB="0" anchor="ctr">
+                  <a:tcPr marL="6750" marR="6750" marT="6750" marB="6750" anchor="ctr">
                     <a:lnL w="9525" cap="flat" cmpd="sng" algn="ctr">
                       <a:solidFill>
                         <a:schemeClr val="bg1">
@@ -6064,7 +6064,7 @@
                       </a:r>
                     </a:p>
                   </a:txBody>
-                  <a:tcPr marL="81005" marR="6750" marT="6750" marB="0" anchor="ctr">
+                  <a:tcPr marL="81005" marR="6750" marT="6750" marB="6750" anchor="ctr">
                     <a:lnL>
                       <a:noFill/>
                     </a:lnL>
@@ -6118,7 +6118,7 @@
                       </a:r>
                     </a:p>
                   </a:txBody>
-                  <a:tcPr marL="81005" marR="6750" marT="6750" marB="0" anchor="ctr">
+                  <a:tcPr marL="81005" marR="6750" marT="6750" marB="6750" anchor="ctr">
                     <a:lnL>
                       <a:noFill/>
                     </a:lnL>
@@ -6176,7 +6176,7 @@
                       </a:r>
                     </a:p>
                   </a:txBody>
-                  <a:tcPr marL="81005" marR="6750" marT="6750" marB="0" anchor="ctr">
+                  <a:tcPr marL="81005" marR="6750" marT="6750" marB="6750" anchor="ctr">
                     <a:lnL>
                       <a:noFill/>
                     </a:lnL>
@@ -6230,7 +6230,7 @@
                       </a:r>
                     </a:p>
                   </a:txBody>
-                  <a:tcPr marL="81005" marR="6750" marT="6750" marB="0" anchor="ctr">
+                  <a:tcPr marL="81005" marR="6750" marT="6750" marB="6750" anchor="ctr">
                     <a:lnL>
                       <a:noFill/>
                     </a:lnL>
@@ -6288,7 +6288,7 @@
                       </a:r>
                     </a:p>
                   </a:txBody>
-                  <a:tcPr marL="81005" marR="6750" marT="6750" marB="0" anchor="ctr">
+                  <a:tcPr marL="81005" marR="6750" marT="6750" marB="6750" anchor="ctr">
                     <a:lnL>
                       <a:noFill/>
                     </a:lnL>
@@ -6342,7 +6342,7 @@
                       </a:r>
                     </a:p>
                   </a:txBody>
-                  <a:tcPr marL="81005" marR="6750" marT="6750" marB="0" anchor="ctr">
+                  <a:tcPr marL="81005" marR="6750" marT="6750" marB="6750" anchor="ctr">
                     <a:lnL>
                       <a:noFill/>
                     </a:lnL>
@@ -6400,7 +6400,7 @@
                       </a:r>
                     </a:p>
                   </a:txBody>
-                  <a:tcPr marL="81005" marR="6750" marT="6750" marB="0" anchor="ctr">
+                  <a:tcPr marL="81005" marR="6750" marT="6750" marB="6750" anchor="ctr">
                     <a:lnL>
                       <a:noFill/>
                     </a:lnL>
@@ -6454,7 +6454,7 @@
                       </a:r>
                     </a:p>
                   </a:txBody>
-                  <a:tcPr marL="81005" marR="6750" marT="6750" marB="0" anchor="ctr">
+                  <a:tcPr marL="81005" marR="6750" marT="6750" marB="6750" anchor="ctr">
                     <a:lnL>
                       <a:noFill/>
                     </a:lnL>
@@ -7036,7 +7036,7 @@
                       </a:r>
                     </a:p>
                   </a:txBody>
-                  <a:tcPr marL="6750" marR="6750" marT="6750" marB="0" anchor="ctr">
+                  <a:tcPr marL="6750" marR="6750" marT="6750" marB="6750" anchor="ctr">
                     <a:lnL>
                       <a:noFill/>
                     </a:lnL>
@@ -7098,7 +7098,7 @@
                       </a:r>
                     </a:p>
                   </a:txBody>
-                  <a:tcPr marL="6750" marR="6750" marT="6750" marB="0" anchor="ctr">
+                  <a:tcPr marL="6750" marR="6750" marT="6750" marB="6750" anchor="ctr">
                     <a:lnL w="9525" cap="flat" cmpd="sng" algn="ctr">
                       <a:solidFill>
                         <a:schemeClr val="bg1">
@@ -7168,7 +7168,7 @@
                       </a:r>
                     </a:p>
                   </a:txBody>
-                  <a:tcPr marL="6750" marR="6750" marT="6750" marB="0" anchor="ctr">
+                  <a:tcPr marL="6750" marR="6750" marT="6750" marB="6750" anchor="ctr">
                     <a:lnL w="9525" cap="flat" cmpd="sng" algn="ctr">
                       <a:solidFill>
                         <a:schemeClr val="bg1">
@@ -7240,7 +7240,7 @@
                       </a:r>
                     </a:p>
                   </a:txBody>
-                  <a:tcPr marL="81005" marR="6750" marT="6750" marB="0" anchor="ctr">
+                  <a:tcPr marL="81005" marR="6750" marT="6750" marB="6750" anchor="ctr">
                     <a:lnL>
                       <a:noFill/>
                     </a:lnL>
@@ -7294,7 +7294,7 @@
                       </a:r>
                     </a:p>
                   </a:txBody>
-                  <a:tcPr marL="81005" marR="6750" marT="6750" marB="0" anchor="ctr">
+                  <a:tcPr marL="81005" marR="6750" marT="6750" marB="6750" anchor="ctr">
                     <a:lnL>
                       <a:noFill/>
                     </a:lnL>
@@ -7350,7 +7350,7 @@
                       </a:r>
                     </a:p>
                   </a:txBody>
-                  <a:tcPr marL="81005" marR="6750" marT="6750" marB="0" anchor="ctr">
+                  <a:tcPr marL="81005" marR="6750" marT="6750" marB="6750" anchor="ctr">
                     <a:lnL>
                       <a:noFill/>
                     </a:lnL>
@@ -7408,7 +7408,7 @@
                       </a:r>
                     </a:p>
                   </a:txBody>
-                  <a:tcPr marL="81005" marR="6750" marT="6750" marB="0" anchor="ctr">
+                  <a:tcPr marL="81005" marR="6750" marT="6750" marB="6750" anchor="ctr">
                     <a:lnL>
                       <a:noFill/>
                     </a:lnL>
@@ -7462,7 +7462,7 @@
                       </a:r>
                     </a:p>
                   </a:txBody>
-                  <a:tcPr marL="81005" marR="6750" marT="6750" marB="0" anchor="ctr">
+                  <a:tcPr marL="81005" marR="6750" marT="6750" marB="6750" anchor="ctr">
                     <a:lnL>
                       <a:noFill/>
                     </a:lnL>
@@ -7518,7 +7518,7 @@
                       </a:r>
                     </a:p>
                   </a:txBody>
-                  <a:tcPr marL="81005" marR="6750" marT="6750" marB="0" anchor="ctr">
+                  <a:tcPr marL="81005" marR="6750" marT="6750" marB="6750" anchor="ctr">
                     <a:lnL>
                       <a:noFill/>
                     </a:lnL>
@@ -7576,7 +7576,7 @@
                       </a:r>
                     </a:p>
                   </a:txBody>
-                  <a:tcPr marL="81005" marR="6750" marT="6750" marB="0" anchor="ctr">
+                  <a:tcPr marL="81005" marR="6750" marT="6750" marB="6750" anchor="ctr">
                     <a:lnL>
                       <a:noFill/>
                     </a:lnL>
@@ -7630,7 +7630,7 @@
                       </a:r>
                     </a:p>
                   </a:txBody>
-                  <a:tcPr marL="81005" marR="6750" marT="6750" marB="0" anchor="ctr">
+                  <a:tcPr marL="81005" marR="6750" marT="6750" marB="6750" anchor="ctr">
                     <a:lnL>
                       <a:noFill/>
                     </a:lnL>
@@ -7686,7 +7686,7 @@
                       </a:r>
                     </a:p>
                   </a:txBody>
-                  <a:tcPr marL="81005" marR="6750" marT="6750" marB="0" anchor="ctr">
+                  <a:tcPr marL="81005" marR="6750" marT="6750" marB="6750" anchor="ctr">
                     <a:lnL>
                       <a:noFill/>
                     </a:lnL>
@@ -7744,7 +7744,7 @@
                       </a:r>
                     </a:p>
                   </a:txBody>
-                  <a:tcPr marL="81005" marR="6750" marT="6750" marB="0" anchor="ctr">
+                  <a:tcPr marL="81005" marR="6750" marT="6750" marB="6750" anchor="ctr">
                     <a:lnL>
                       <a:noFill/>
                     </a:lnL>
@@ -7798,7 +7798,7 @@
                       </a:r>
                     </a:p>
                   </a:txBody>
-                  <a:tcPr marL="81005" marR="6750" marT="6750" marB="0" anchor="ctr">
+                  <a:tcPr marL="81005" marR="6750" marT="6750" marB="6750" anchor="ctr">
                     <a:lnL>
                       <a:noFill/>
                     </a:lnL>
@@ -7854,7 +7854,7 @@
                       </a:r>
                     </a:p>
                   </a:txBody>
-                  <a:tcPr marL="81005" marR="6750" marT="6750" marB="0" anchor="ctr">
+                  <a:tcPr marL="81005" marR="6750" marT="6750" marB="6750" anchor="ctr">
                     <a:lnL>
                       <a:noFill/>
                     </a:lnL>
@@ -8197,7 +8197,7 @@
                 <a:latin typeface="맑은 고딕"/>
                 <a:ea typeface="맑은 고딕"/>
               </a:rPr>
-              <a:t> 업무 규칙·용어집·상태 기계·의존 규칙·검사를 다시 쓰지 않는다. 작업 명세서와 수용 기준만 새로 쓴다.</a:t>
+              <a:t> 업무 규칙·용어집·상태 기계·의존 규칙·검사를 다시 작성하지 않는다. 작업 명세서와 수용 기준만 새로 작성한다.</a:t>
             </a:r>
           </a:p>
         </p:txBody>
@@ -8405,7 +8405,7 @@
                       </a:r>
                     </a:p>
                   </a:txBody>
-                  <a:tcPr marL="6750" marR="6750" marT="6750" marB="0" anchor="ctr">
+                  <a:tcPr marL="6750" marR="6750" marT="6750" marB="6750" anchor="ctr">
                     <a:lnL>
                       <a:noFill/>
                     </a:lnL>
@@ -8467,7 +8467,7 @@
                       </a:r>
                     </a:p>
                   </a:txBody>
-                  <a:tcPr marL="6750" marR="6750" marT="6750" marB="0" anchor="ctr">
+                  <a:tcPr marL="6750" marR="6750" marT="6750" marB="6750" anchor="ctr">
                     <a:lnL w="9525" cap="flat" cmpd="sng" algn="ctr">
                       <a:solidFill>
                         <a:schemeClr val="bg1">
@@ -8539,7 +8539,7 @@
                       </a:r>
                     </a:p>
                   </a:txBody>
-                  <a:tcPr marL="81005" marR="6750" marT="6750" marB="0" anchor="ctr">
+                  <a:tcPr marL="81005" marR="6750" marT="6750" marB="6750" anchor="ctr">
                     <a:lnL>
                       <a:noFill/>
                     </a:lnL>
@@ -8593,7 +8593,7 @@
                       </a:r>
                     </a:p>
                   </a:txBody>
-                  <a:tcPr marL="81005" marR="6750" marT="6750" marB="0" anchor="ctr">
+                  <a:tcPr marL="81005" marR="6750" marT="6750" marB="6750" anchor="ctr">
                     <a:lnL>
                       <a:noFill/>
                     </a:lnL>
@@ -8651,7 +8651,7 @@
                       </a:r>
                     </a:p>
                   </a:txBody>
-                  <a:tcPr marL="81005" marR="6750" marT="6750" marB="0" anchor="ctr">
+                  <a:tcPr marL="81005" marR="6750" marT="6750" marB="6750" anchor="ctr">
                     <a:lnL>
                       <a:noFill/>
                     </a:lnL>
@@ -8705,7 +8705,7 @@
                       </a:r>
                     </a:p>
                   </a:txBody>
-                  <a:tcPr marL="81005" marR="6750" marT="6750" marB="0" anchor="ctr">
+                  <a:tcPr marL="81005" marR="6750" marT="6750" marB="6750" anchor="ctr">
                     <a:lnL>
                       <a:noFill/>
                     </a:lnL>
@@ -8763,7 +8763,7 @@
                       </a:r>
                     </a:p>
                   </a:txBody>
-                  <a:tcPr marL="81005" marR="6750" marT="6750" marB="0" anchor="ctr">
+                  <a:tcPr marL="81005" marR="6750" marT="6750" marB="6750" anchor="ctr">
                     <a:lnL>
                       <a:noFill/>
                     </a:lnL>
@@ -8817,7 +8817,7 @@
                       </a:r>
                     </a:p>
                   </a:txBody>
-                  <a:tcPr marL="81005" marR="6750" marT="6750" marB="0" anchor="ctr">
+                  <a:tcPr marL="81005" marR="6750" marT="6750" marB="6750" anchor="ctr">
                     <a:lnL>
                       <a:noFill/>
                     </a:lnL>
@@ -8875,7 +8875,7 @@
                       </a:r>
                     </a:p>
                   </a:txBody>
-                  <a:tcPr marL="81005" marR="6750" marT="6750" marB="0" anchor="ctr">
+                  <a:tcPr marL="81005" marR="6750" marT="6750" marB="6750" anchor="ctr">
                     <a:lnL>
                       <a:noFill/>
                     </a:lnL>
@@ -8929,7 +8929,7 @@
                       </a:r>
                     </a:p>
                   </a:txBody>
-                  <a:tcPr marL="81005" marR="6750" marT="6750" marB="0" anchor="ctr">
+                  <a:tcPr marL="81005" marR="6750" marT="6750" marB="6750" anchor="ctr">
                     <a:lnL>
                       <a:noFill/>
                     </a:lnL>
@@ -8987,7 +8987,7 @@
                       </a:r>
                     </a:p>
                   </a:txBody>
-                  <a:tcPr marL="81005" marR="6750" marT="6750" marB="0" anchor="ctr">
+                  <a:tcPr marL="81005" marR="6750" marT="6750" marB="6750" anchor="ctr">
                     <a:lnL>
                       <a:noFill/>
                     </a:lnL>
@@ -9041,7 +9041,7 @@
                       </a:r>
                     </a:p>
                   </a:txBody>
-                  <a:tcPr marL="81005" marR="6750" marT="6750" marB="0" anchor="ctr">
+                  <a:tcPr marL="81005" marR="6750" marT="6750" marB="6750" anchor="ctr">
                     <a:lnL>
                       <a:noFill/>
                     </a:lnL>
@@ -9099,7 +9099,7 @@
                       </a:r>
                     </a:p>
                   </a:txBody>
-                  <a:tcPr marL="81005" marR="6750" marT="6750" marB="0" anchor="ctr">
+                  <a:tcPr marL="81005" marR="6750" marT="6750" marB="6750" anchor="ctr">
                     <a:lnL>
                       <a:noFill/>
                     </a:lnL>
@@ -9153,7 +9153,7 @@
                       </a:r>
                     </a:p>
                   </a:txBody>
-                  <a:tcPr marL="81005" marR="6750" marT="6750" marB="0" anchor="ctr">
+                  <a:tcPr marL="81005" marR="6750" marT="6750" marB="6750" anchor="ctr">
                     <a:lnL>
                       <a:noFill/>
                     </a:lnL>
@@ -9237,7 +9237,7 @@
                 <a:latin typeface="맑은 고딕"/>
                 <a:ea typeface="맑은 고딕"/>
               </a:rPr>
-              <a:t>열한 세션 동안 AI가 한 일은 많았다. 그러나 </a:t>
+              <a:t>11세션 동안 AI가 한 일은 많았다. 그러나 </a:t>
             </a:r>
             <a:r>
               <a:rPr sz="1800" b="1">
@@ -10144,7 +10144,7 @@
                 <a:latin typeface="맑은 고딕"/>
                 <a:ea typeface="맑은 고딕"/>
               </a:rPr>
-              <a:t>[앞선 질문에 대한 답] [추가 질문·수정 요청] 이번 실행을 MD 하나로 정리해라. 맡긴 단위와 결과, 검사 출력, 멈춰 물은 것, 되돌린 결정과 전파한 자리, 남은 미정으로 구성하고 새 결정을 추가하지 마라. 다섯 장을 넘지 않게 핵심만 남겨라.</a:t>
+              <a:t>[앞선 질문에 대한 답] [추가 질문·수정 요청] 이번 실행을 MD 하나로 정리해라. 맡긴 단위와 결과, 검사 출력, 멈춰 물은 것, 되돌린 결정과 전파한 자리, 남은 미정으로 구성하고 새 결정을 추가하지 마라. 5장을 넘지 않게 핵심만 남겨라.</a:t>
             </a:r>
           </a:p>
           <a:p>
@@ -10886,7 +10886,7 @@
                 <a:latin typeface="맑은 고딕"/>
                 <a:ea typeface="맑은 고딕"/>
               </a:rPr>
-              <a:t>녹색은 쓴 검사만큼만</a:t>
+              <a:t>녹색은 작성한 검사만큼만</a:t>
             </a:r>
             <a:r>
               <a:rPr sz="1800" b="0">
@@ -11245,7 +11245,7 @@
                       </a:r>
                     </a:p>
                   </a:txBody>
-                  <a:tcPr marL="6750" marR="6750" marT="6750" marB="0" anchor="ctr">
+                  <a:tcPr marL="6750" marR="6750" marT="6750" marB="6750" anchor="ctr">
                     <a:lnL>
                       <a:noFill/>
                     </a:lnL>
@@ -11307,7 +11307,7 @@
                       </a:r>
                     </a:p>
                   </a:txBody>
-                  <a:tcPr marL="6750" marR="6750" marT="6750" marB="0" anchor="ctr">
+                  <a:tcPr marL="6750" marR="6750" marT="6750" marB="6750" anchor="ctr">
                     <a:lnL w="9525" cap="flat" cmpd="sng" algn="ctr">
                       <a:solidFill>
                         <a:schemeClr val="bg1">
@@ -11379,7 +11379,7 @@
                       </a:r>
                     </a:p>
                   </a:txBody>
-                  <a:tcPr marL="81005" marR="6750" marT="6750" marB="0" anchor="ctr">
+                  <a:tcPr marL="81005" marR="6750" marT="6750" marB="6750" anchor="ctr">
                     <a:lnL>
                       <a:noFill/>
                     </a:lnL>
@@ -11433,7 +11433,7 @@
                       </a:r>
                     </a:p>
                   </a:txBody>
-                  <a:tcPr marL="81005" marR="6750" marT="6750" marB="0" anchor="ctr">
+                  <a:tcPr marL="81005" marR="6750" marT="6750" marB="6750" anchor="ctr">
                     <a:lnL>
                       <a:noFill/>
                     </a:lnL>
@@ -11491,7 +11491,7 @@
                       </a:r>
                     </a:p>
                   </a:txBody>
-                  <a:tcPr marL="81005" marR="6750" marT="6750" marB="0" anchor="ctr">
+                  <a:tcPr marL="81005" marR="6750" marT="6750" marB="6750" anchor="ctr">
                     <a:lnL>
                       <a:noFill/>
                     </a:lnL>
@@ -11545,7 +11545,7 @@
                       </a:r>
                     </a:p>
                   </a:txBody>
-                  <a:tcPr marL="81005" marR="6750" marT="6750" marB="0" anchor="ctr">
+                  <a:tcPr marL="81005" marR="6750" marT="6750" marB="6750" anchor="ctr">
                     <a:lnL>
                       <a:noFill/>
                     </a:lnL>
@@ -11603,7 +11603,7 @@
                       </a:r>
                     </a:p>
                   </a:txBody>
-                  <a:tcPr marL="81005" marR="6750" marT="6750" marB="0" anchor="ctr">
+                  <a:tcPr marL="81005" marR="6750" marT="6750" marB="6750" anchor="ctr">
                     <a:lnL>
                       <a:noFill/>
                     </a:lnL>
@@ -11657,7 +11657,7 @@
                       </a:r>
                     </a:p>
                   </a:txBody>
-                  <a:tcPr marL="81005" marR="6750" marT="6750" marB="0" anchor="ctr">
+                  <a:tcPr marL="81005" marR="6750" marT="6750" marB="6750" anchor="ctr">
                     <a:lnL>
                       <a:noFill/>
                     </a:lnL>
@@ -11715,7 +11715,7 @@
                       </a:r>
                     </a:p>
                   </a:txBody>
-                  <a:tcPr marL="81005" marR="6750" marT="6750" marB="0" anchor="ctr">
+                  <a:tcPr marL="81005" marR="6750" marT="6750" marB="6750" anchor="ctr">
                     <a:lnL>
                       <a:noFill/>
                     </a:lnL>
@@ -11769,7 +11769,7 @@
                       </a:r>
                     </a:p>
                   </a:txBody>
-                  <a:tcPr marL="81005" marR="6750" marT="6750" marB="0" anchor="ctr">
+                  <a:tcPr marL="81005" marR="6750" marT="6750" marB="6750" anchor="ctr">
                     <a:lnL>
                       <a:noFill/>
                     </a:lnL>
@@ -13163,7 +13163,7 @@
                 <a:latin typeface="맑은 고딕"/>
                 <a:ea typeface="맑은 고딕"/>
               </a:rPr>
-              <a:t> 업무 규칙과 용어, 상태와 전이, 의존 규칙은 회사가 정한다. 한 번 정하면 계속 쓴다.</a:t>
+              <a:t> 업무 규칙과 용어, 상태와 전이, 의존 규칙은 회사가 정한다. 한 번 정하면 계속 사용한다.</a:t>
             </a:r>
           </a:p>
           <a:p>
@@ -13186,7 +13186,7 @@
                 <a:latin typeface="맑은 고딕"/>
                 <a:ea typeface="맑은 고딕"/>
               </a:rPr>
-              <a:t>작업마다 쓰는 것</a:t>
+              <a:t>작업마다 작성하는 것</a:t>
             </a:r>
             <a:r>
               <a:rPr sz="1800" b="0">
@@ -13206,7 +13206,7 @@
                 <a:latin typeface="맑은 고딕"/>
                 <a:ea typeface="맑은 고딕"/>
               </a:rPr>
-              <a:t> 작업 명세서와 수용 기준만 작업 단위마다 새로 쓴다.</a:t>
+              <a:t> 작업 명세서와 수용 기준만 작업 단위마다 새로 작성한다.</a:t>
             </a:r>
           </a:p>
           <a:p>
@@ -13563,7 +13563,7 @@
                       </a:r>
                     </a:p>
                   </a:txBody>
-                  <a:tcPr marL="6750" marR="6750" marT="6750" marB="0" anchor="ctr">
+                  <a:tcPr marL="6750" marR="6750" marT="6750" marB="6750" anchor="ctr">
                     <a:lnL>
                       <a:noFill/>
                     </a:lnL>
@@ -13625,7 +13625,7 @@
                       </a:r>
                     </a:p>
                   </a:txBody>
-                  <a:tcPr marL="6750" marR="6750" marT="6750" marB="0" anchor="ctr">
+                  <a:tcPr marL="6750" marR="6750" marT="6750" marB="6750" anchor="ctr">
                     <a:lnL w="9525" cap="flat" cmpd="sng" algn="ctr">
                       <a:solidFill>
                         <a:schemeClr val="bg1">
@@ -13695,7 +13695,7 @@
                       </a:r>
                     </a:p>
                   </a:txBody>
-                  <a:tcPr marL="6750" marR="6750" marT="6750" marB="0" anchor="ctr">
+                  <a:tcPr marL="6750" marR="6750" marT="6750" marB="6750" anchor="ctr">
                     <a:lnL w="9525" cap="flat" cmpd="sng" algn="ctr">
                       <a:solidFill>
                         <a:schemeClr val="bg1">
@@ -13767,7 +13767,7 @@
                       </a:r>
                     </a:p>
                   </a:txBody>
-                  <a:tcPr marL="81005" marR="6750" marT="6750" marB="0" anchor="ctr">
+                  <a:tcPr marL="81005" marR="6750" marT="6750" marB="6750" anchor="ctr">
                     <a:lnL>
                       <a:noFill/>
                     </a:lnL>
@@ -13821,7 +13821,7 @@
                       </a:r>
                     </a:p>
                   </a:txBody>
-                  <a:tcPr marL="81005" marR="6750" marT="6750" marB="0" anchor="ctr">
+                  <a:tcPr marL="81005" marR="6750" marT="6750" marB="6750" anchor="ctr">
                     <a:lnL>
                       <a:noFill/>
                     </a:lnL>
@@ -13877,7 +13877,7 @@
                       </a:r>
                     </a:p>
                   </a:txBody>
-                  <a:tcPr marL="81005" marR="6750" marT="6750" marB="0" anchor="ctr">
+                  <a:tcPr marL="81005" marR="6750" marT="6750" marB="6750" anchor="ctr">
                     <a:lnL>
                       <a:noFill/>
                     </a:lnL>
@@ -13935,7 +13935,7 @@
                       </a:r>
                     </a:p>
                   </a:txBody>
-                  <a:tcPr marL="81005" marR="6750" marT="6750" marB="0" anchor="ctr">
+                  <a:tcPr marL="81005" marR="6750" marT="6750" marB="6750" anchor="ctr">
                     <a:lnL>
                       <a:noFill/>
                     </a:lnL>
@@ -13989,7 +13989,7 @@
                       </a:r>
                     </a:p>
                   </a:txBody>
-                  <a:tcPr marL="81005" marR="6750" marT="6750" marB="0" anchor="ctr">
+                  <a:tcPr marL="81005" marR="6750" marT="6750" marB="6750" anchor="ctr">
                     <a:lnL>
                       <a:noFill/>
                     </a:lnL>
@@ -14045,7 +14045,7 @@
                       </a:r>
                     </a:p>
                   </a:txBody>
-                  <a:tcPr marL="81005" marR="6750" marT="6750" marB="0" anchor="ctr">
+                  <a:tcPr marL="81005" marR="6750" marT="6750" marB="6750" anchor="ctr">
                     <a:lnL>
                       <a:noFill/>
                     </a:lnL>
@@ -14103,7 +14103,7 @@
                       </a:r>
                     </a:p>
                   </a:txBody>
-                  <a:tcPr marL="81005" marR="6750" marT="6750" marB="0" anchor="ctr">
+                  <a:tcPr marL="81005" marR="6750" marT="6750" marB="6750" anchor="ctr">
                     <a:lnL>
                       <a:noFill/>
                     </a:lnL>
@@ -14157,7 +14157,7 @@
                       </a:r>
                     </a:p>
                   </a:txBody>
-                  <a:tcPr marL="81005" marR="6750" marT="6750" marB="0" anchor="ctr">
+                  <a:tcPr marL="81005" marR="6750" marT="6750" marB="6750" anchor="ctr">
                     <a:lnL>
                       <a:noFill/>
                     </a:lnL>
@@ -14213,7 +14213,7 @@
                       </a:r>
                     </a:p>
                   </a:txBody>
-                  <a:tcPr marL="81005" marR="6750" marT="6750" marB="0" anchor="ctr">
+                  <a:tcPr marL="81005" marR="6750" marT="6750" marB="6750" anchor="ctr">
                     <a:lnL>
                       <a:noFill/>
                     </a:lnL>
@@ -14271,7 +14271,7 @@
                       </a:r>
                     </a:p>
                   </a:txBody>
-                  <a:tcPr marL="81005" marR="6750" marT="6750" marB="0" anchor="ctr">
+                  <a:tcPr marL="81005" marR="6750" marT="6750" marB="6750" anchor="ctr">
                     <a:lnL>
                       <a:noFill/>
                     </a:lnL>
@@ -14325,7 +14325,7 @@
                       </a:r>
                     </a:p>
                   </a:txBody>
-                  <a:tcPr marL="81005" marR="6750" marT="6750" marB="0" anchor="ctr">
+                  <a:tcPr marL="81005" marR="6750" marT="6750" marB="6750" anchor="ctr">
                     <a:lnL>
                       <a:noFill/>
                     </a:lnL>
@@ -14381,7 +14381,7 @@
                       </a:r>
                     </a:p>
                   </a:txBody>
-                  <a:tcPr marL="81005" marR="6750" marT="6750" marB="0" anchor="ctr">
+                  <a:tcPr marL="81005" marR="6750" marT="6750" marB="6750" anchor="ctr">
                     <a:lnL>
                       <a:noFill/>
                     </a:lnL>
@@ -14439,7 +14439,7 @@
                       </a:r>
                     </a:p>
                   </a:txBody>
-                  <a:tcPr marL="81005" marR="6750" marT="6750" marB="0" anchor="ctr">
+                  <a:tcPr marL="81005" marR="6750" marT="6750" marB="6750" anchor="ctr">
                     <a:lnL>
                       <a:noFill/>
                     </a:lnL>
@@ -14493,7 +14493,7 @@
                       </a:r>
                     </a:p>
                   </a:txBody>
-                  <a:tcPr marL="81005" marR="6750" marT="6750" marB="0" anchor="ctr">
+                  <a:tcPr marL="81005" marR="6750" marT="6750" marB="6750" anchor="ctr">
                     <a:lnL>
                       <a:noFill/>
                     </a:lnL>
@@ -14549,7 +14549,7 @@
                       </a:r>
                     </a:p>
                   </a:txBody>
-                  <a:tcPr marL="81005" marR="6750" marT="6750" marB="0" anchor="ctr">
+                  <a:tcPr marL="81005" marR="6750" marT="6750" marB="6750" anchor="ctr">
                     <a:lnL>
                       <a:noFill/>
                     </a:lnL>
@@ -14607,7 +14607,7 @@
                       </a:r>
                     </a:p>
                   </a:txBody>
-                  <a:tcPr marL="81005" marR="6750" marT="6750" marB="0" anchor="ctr">
+                  <a:tcPr marL="81005" marR="6750" marT="6750" marB="6750" anchor="ctr">
                     <a:lnL>
                       <a:noFill/>
                     </a:lnL>
@@ -14661,7 +14661,7 @@
                       </a:r>
                     </a:p>
                   </a:txBody>
-                  <a:tcPr marL="81005" marR="6750" marT="6750" marB="0" anchor="ctr">
+                  <a:tcPr marL="81005" marR="6750" marT="6750" marB="6750" anchor="ctr">
                     <a:lnL>
                       <a:noFill/>
                     </a:lnL>
@@ -14717,7 +14717,7 @@
                       </a:r>
                     </a:p>
                   </a:txBody>
-                  <a:tcPr marL="81005" marR="6750" marT="6750" marB="0" anchor="ctr">
+                  <a:tcPr marL="81005" marR="6750" marT="6750" marB="6750" anchor="ctr">
                     <a:lnL>
                       <a:noFill/>
                     </a:lnL>
@@ -15917,7 +15917,7 @@
                       </a:r>
                     </a:p>
                   </a:txBody>
-                  <a:tcPr marL="6750" marR="6750" marT="6750" marB="0" anchor="ctr">
+                  <a:tcPr marL="6750" marR="6750" marT="6750" marB="6750" anchor="ctr">
                     <a:lnL>
                       <a:noFill/>
                     </a:lnL>
@@ -15979,7 +15979,7 @@
                       </a:r>
                     </a:p>
                   </a:txBody>
-                  <a:tcPr marL="6750" marR="6750" marT="6750" marB="0" anchor="ctr">
+                  <a:tcPr marL="6750" marR="6750" marT="6750" marB="6750" anchor="ctr">
                     <a:lnL w="9525" cap="flat" cmpd="sng" algn="ctr">
                       <a:solidFill>
                         <a:schemeClr val="bg1">
@@ -16051,7 +16051,7 @@
                       </a:r>
                     </a:p>
                   </a:txBody>
-                  <a:tcPr marL="81005" marR="6750" marT="6750" marB="0" anchor="ctr">
+                  <a:tcPr marL="81005" marR="6750" marT="6750" marB="6750" anchor="ctr">
                     <a:lnL>
                       <a:noFill/>
                     </a:lnL>
@@ -16105,7 +16105,7 @@
                       </a:r>
                     </a:p>
                   </a:txBody>
-                  <a:tcPr marL="81005" marR="6750" marT="6750" marB="0" anchor="ctr">
+                  <a:tcPr marL="81005" marR="6750" marT="6750" marB="6750" anchor="ctr">
                     <a:lnL>
                       <a:noFill/>
                     </a:lnL>
@@ -16163,7 +16163,7 @@
                       </a:r>
                     </a:p>
                   </a:txBody>
-                  <a:tcPr marL="81005" marR="6750" marT="6750" marB="0" anchor="ctr">
+                  <a:tcPr marL="81005" marR="6750" marT="6750" marB="6750" anchor="ctr">
                     <a:lnL>
                       <a:noFill/>
                     </a:lnL>
@@ -16217,7 +16217,7 @@
                       </a:r>
                     </a:p>
                   </a:txBody>
-                  <a:tcPr marL="81005" marR="6750" marT="6750" marB="0" anchor="ctr">
+                  <a:tcPr marL="81005" marR="6750" marT="6750" marB="6750" anchor="ctr">
                     <a:lnL>
                       <a:noFill/>
                     </a:lnL>
@@ -16275,7 +16275,7 @@
                       </a:r>
                     </a:p>
                   </a:txBody>
-                  <a:tcPr marL="81005" marR="6750" marT="6750" marB="0" anchor="ctr">
+                  <a:tcPr marL="81005" marR="6750" marT="6750" marB="6750" anchor="ctr">
                     <a:lnL>
                       <a:noFill/>
                     </a:lnL>
@@ -16329,7 +16329,7 @@
                       </a:r>
                     </a:p>
                   </a:txBody>
-                  <a:tcPr marL="81005" marR="6750" marT="6750" marB="0" anchor="ctr">
+                  <a:tcPr marL="81005" marR="6750" marT="6750" marB="6750" anchor="ctr">
                     <a:lnL>
                       <a:noFill/>
                     </a:lnL>
@@ -16387,7 +16387,7 @@
                       </a:r>
                     </a:p>
                   </a:txBody>
-                  <a:tcPr marL="81005" marR="6750" marT="6750" marB="0" anchor="ctr">
+                  <a:tcPr marL="81005" marR="6750" marT="6750" marB="6750" anchor="ctr">
                     <a:lnL>
                       <a:noFill/>
                     </a:lnL>
@@ -16441,7 +16441,7 @@
                       </a:r>
                     </a:p>
                   </a:txBody>
-                  <a:tcPr marL="81005" marR="6750" marT="6750" marB="0" anchor="ctr">
+                  <a:tcPr marL="81005" marR="6750" marT="6750" marB="6750" anchor="ctr">
                     <a:lnL>
                       <a:noFill/>
                     </a:lnL>
@@ -16983,7 +16983,7 @@
                       </a:r>
                     </a:p>
                   </a:txBody>
-                  <a:tcPr marL="6750" marR="6750" marT="6750" marB="0" anchor="ctr">
+                  <a:tcPr marL="6750" marR="6750" marT="6750" marB="6750" anchor="ctr">
                     <a:lnL>
                       <a:noFill/>
                     </a:lnL>
@@ -17045,7 +17045,7 @@
                       </a:r>
                     </a:p>
                   </a:txBody>
-                  <a:tcPr marL="6750" marR="6750" marT="6750" marB="0" anchor="ctr">
+                  <a:tcPr marL="6750" marR="6750" marT="6750" marB="6750" anchor="ctr">
                     <a:lnL w="9525" cap="flat" cmpd="sng" algn="ctr">
                       <a:solidFill>
                         <a:schemeClr val="bg1">
@@ -17115,7 +17115,7 @@
                       </a:r>
                     </a:p>
                   </a:txBody>
-                  <a:tcPr marL="6750" marR="6750" marT="6750" marB="0" anchor="ctr">
+                  <a:tcPr marL="6750" marR="6750" marT="6750" marB="6750" anchor="ctr">
                     <a:lnL w="9525" cap="flat" cmpd="sng" algn="ctr">
                       <a:solidFill>
                         <a:schemeClr val="bg1">
@@ -17187,7 +17187,7 @@
                       </a:r>
                     </a:p>
                   </a:txBody>
-                  <a:tcPr marL="81005" marR="6750" marT="6750" marB="0" anchor="ctr">
+                  <a:tcPr marL="81005" marR="6750" marT="6750" marB="6750" anchor="ctr">
                     <a:lnL>
                       <a:noFill/>
                     </a:lnL>
@@ -17241,7 +17241,7 @@
                       </a:r>
                     </a:p>
                   </a:txBody>
-                  <a:tcPr marL="81005" marR="6750" marT="6750" marB="0" anchor="ctr">
+                  <a:tcPr marL="81005" marR="6750" marT="6750" marB="6750" anchor="ctr">
                     <a:lnL>
                       <a:noFill/>
                     </a:lnL>
@@ -17297,7 +17297,7 @@
                       </a:r>
                     </a:p>
                   </a:txBody>
-                  <a:tcPr marL="81005" marR="6750" marT="6750" marB="0" anchor="ctr">
+                  <a:tcPr marL="81005" marR="6750" marT="6750" marB="6750" anchor="ctr">
                     <a:lnL>
                       <a:noFill/>
                     </a:lnL>
@@ -17355,7 +17355,7 @@
                       </a:r>
                     </a:p>
                   </a:txBody>
-                  <a:tcPr marL="81005" marR="6750" marT="6750" marB="0" anchor="ctr">
+                  <a:tcPr marL="81005" marR="6750" marT="6750" marB="6750" anchor="ctr">
                     <a:lnL>
                       <a:noFill/>
                     </a:lnL>
@@ -17409,7 +17409,7 @@
                       </a:r>
                     </a:p>
                   </a:txBody>
-                  <a:tcPr marL="81005" marR="6750" marT="6750" marB="0" anchor="ctr">
+                  <a:tcPr marL="81005" marR="6750" marT="6750" marB="6750" anchor="ctr">
                     <a:lnL>
                       <a:noFill/>
                     </a:lnL>
@@ -17465,7 +17465,7 @@
                       </a:r>
                     </a:p>
                   </a:txBody>
-                  <a:tcPr marL="81005" marR="6750" marT="6750" marB="0" anchor="ctr">
+                  <a:tcPr marL="81005" marR="6750" marT="6750" marB="6750" anchor="ctr">
                     <a:lnL>
                       <a:noFill/>
                     </a:lnL>
@@ -17523,7 +17523,7 @@
                       </a:r>
                     </a:p>
                   </a:txBody>
-                  <a:tcPr marL="81005" marR="6750" marT="6750" marB="0" anchor="ctr">
+                  <a:tcPr marL="81005" marR="6750" marT="6750" marB="6750" anchor="ctr">
                     <a:lnL>
                       <a:noFill/>
                     </a:lnL>
@@ -17577,7 +17577,7 @@
                       </a:r>
                     </a:p>
                   </a:txBody>
-                  <a:tcPr marL="81005" marR="6750" marT="6750" marB="0" anchor="ctr">
+                  <a:tcPr marL="81005" marR="6750" marT="6750" marB="6750" anchor="ctr">
                     <a:lnL>
                       <a:noFill/>
                     </a:lnL>
@@ -17633,7 +17633,7 @@
                       </a:r>
                     </a:p>
                   </a:txBody>
-                  <a:tcPr marL="81005" marR="6750" marT="6750" marB="0" anchor="ctr">
+                  <a:tcPr marL="81005" marR="6750" marT="6750" marB="6750" anchor="ctr">
                     <a:lnL>
                       <a:noFill/>
                     </a:lnL>
@@ -17691,7 +17691,7 @@
                       </a:r>
                     </a:p>
                   </a:txBody>
-                  <a:tcPr marL="81005" marR="6750" marT="6750" marB="0" anchor="ctr">
+                  <a:tcPr marL="81005" marR="6750" marT="6750" marB="6750" anchor="ctr">
                     <a:lnL>
                       <a:noFill/>
                     </a:lnL>
@@ -17745,7 +17745,7 @@
                       </a:r>
                     </a:p>
                   </a:txBody>
-                  <a:tcPr marL="81005" marR="6750" marT="6750" marB="0" anchor="ctr">
+                  <a:tcPr marL="81005" marR="6750" marT="6750" marB="6750" anchor="ctr">
                     <a:lnL>
                       <a:noFill/>
                     </a:lnL>
@@ -17801,7 +17801,7 @@
                       </a:r>
                     </a:p>
                   </a:txBody>
-                  <a:tcPr marL="81005" marR="6750" marT="6750" marB="0" anchor="ctr">
+                  <a:tcPr marL="81005" marR="6750" marT="6750" marB="6750" anchor="ctr">
                     <a:lnL>
                       <a:noFill/>
                     </a:lnL>
@@ -18431,7 +18431,7 @@
         </p:nvSpPr>
         <p:spPr>
           <a:xfrm>
-            <a:off x="365760" y="1842998"/>
+            <a:off x="365760" y="1585960"/>
             <a:ext cx="8412480" cy="2476500"/>
           </a:xfrm>
           <a:prstGeom prst="rect">
@@ -18771,7 +18771,7 @@
         <p:spPr>
           <a:xfrm>
             <a:off x="365760" y="960120"/>
-            <a:ext cx="8412480" cy="781278"/>
+            <a:ext cx="8412480" cy="524240"/>
           </a:xfrm>
         </p:spPr>
         <p:txBody>
@@ -18807,7 +18807,7 @@
                 <a:latin typeface="맑은 고딕"/>
                 <a:ea typeface="맑은 고딕"/>
               </a:rPr>
-              <a:t>일곱 줄의 통과</a:t>
+              <a:t>7줄의 통과</a:t>
             </a:r>
             <a:r>
               <a:rPr sz="1800" b="0">
@@ -18836,7 +18836,7 @@
         </p:nvSpPr>
         <p:spPr>
           <a:xfrm>
-            <a:off x="365760" y="4548098"/>
+            <a:off x="365760" y="4291060"/>
             <a:ext cx="8412480" cy="1402080"/>
           </a:xfrm>
           <a:prstGeom prst="rect">
@@ -19185,7 +19185,7 @@
                       </a:r>
                     </a:p>
                   </a:txBody>
-                  <a:tcPr marL="6750" marR="6750" marT="6750" marB="0" anchor="ctr">
+                  <a:tcPr marL="6750" marR="6750" marT="6750" marB="6750" anchor="ctr">
                     <a:lnL>
                       <a:noFill/>
                     </a:lnL>
@@ -19247,7 +19247,7 @@
                       </a:r>
                     </a:p>
                   </a:txBody>
-                  <a:tcPr marL="6750" marR="6750" marT="6750" marB="0" anchor="ctr">
+                  <a:tcPr marL="6750" marR="6750" marT="6750" marB="6750" anchor="ctr">
                     <a:lnL w="9525" cap="flat" cmpd="sng" algn="ctr">
                       <a:solidFill>
                         <a:schemeClr val="bg1">
@@ -19319,7 +19319,7 @@
                       </a:r>
                     </a:p>
                   </a:txBody>
-                  <a:tcPr marL="81005" marR="6750" marT="6750" marB="0" anchor="ctr">
+                  <a:tcPr marL="81005" marR="6750" marT="6750" marB="6750" anchor="ctr">
                     <a:lnL>
                       <a:noFill/>
                     </a:lnL>
@@ -19369,11 +19369,11 @@
                           <a:ea typeface="맑은 고딕" panose="020B0503020000020004" pitchFamily="34" charset="-127"/>
                           <a:cs typeface="맑은 고딕"/>
                         </a:rPr>
-                        <a:t>정책이 없어 기대값을 쓸 수 없었다</a:t>
+                        <a:t>정책이 없어 기대값을 작성할 수 없었다</a:t>
                       </a:r>
                     </a:p>
                   </a:txBody>
-                  <a:tcPr marL="81005" marR="6750" marT="6750" marB="0" anchor="ctr">
+                  <a:tcPr marL="81005" marR="6750" marT="6750" marB="6750" anchor="ctr">
                     <a:lnL>
                       <a:noFill/>
                     </a:lnL>
@@ -19431,7 +19431,7 @@
                       </a:r>
                     </a:p>
                   </a:txBody>
-                  <a:tcPr marL="81005" marR="6750" marT="6750" marB="0" anchor="ctr">
+                  <a:tcPr marL="81005" marR="6750" marT="6750" marB="6750" anchor="ctr">
                     <a:lnL>
                       <a:noFill/>
                     </a:lnL>
@@ -19485,7 +19485,7 @@
                       </a:r>
                     </a:p>
                   </a:txBody>
-                  <a:tcPr marL="81005" marR="6750" marT="6750" marB="0" anchor="ctr">
+                  <a:tcPr marL="81005" marR="6750" marT="6750" marB="6750" anchor="ctr">
                     <a:lnL>
                       <a:noFill/>
                     </a:lnL>
@@ -19543,7 +19543,7 @@
                       </a:r>
                     </a:p>
                   </a:txBody>
-                  <a:tcPr marL="81005" marR="6750" marT="6750" marB="0" anchor="ctr">
+                  <a:tcPr marL="81005" marR="6750" marT="6750" marB="6750" anchor="ctr">
                     <a:lnL>
                       <a:noFill/>
                     </a:lnL>
@@ -19597,7 +19597,7 @@
                       </a:r>
                     </a:p>
                   </a:txBody>
-                  <a:tcPr marL="81005" marR="6750" marT="6750" marB="0" anchor="ctr">
+                  <a:tcPr marL="81005" marR="6750" marT="6750" marB="6750" anchor="ctr">
                     <a:lnL>
                       <a:noFill/>
                     </a:lnL>

--- a/courses/ai-native/sessions/s11.pptx
+++ b/courses/ai-native/sessions/s11.pptx
@@ -1697,7 +1697,7 @@
             <a:pPr lvl="0"/>
             <a:r>
               <a:rPr lang="ko-KR" sz="1200"/>
-              <a:t>자율성은 선언으로 올리지 않는다. "세션 02. LLM이라는 재료"의 자율성의 계단에서 올리는 조건이 증거였다. 여기서 그 증거가 검사 출력이다.</a:t>
+              <a:t>자율성은 선언으로 올리지 않는다. "세션 02. LLM이라는 도구"의 자율성의 계단에서 올리는 조건이 증거였다. 여기서 그 증거가 검사 출력이다.</a:t>
             </a:r>
           </a:p>
           <a:p>

--- a/courses/ai-native/sessions/s11.pptx
+++ b/courses/ai-native/sessions/s11.pptx
@@ -4832,7 +4832,7 @@
         </p:nvGraphicFramePr>
         <p:xfrm>
           <a:off x="1648015" y="2112010"/>
-          <a:ext cx="5834380" cy="3873500"/>
+          <a:ext cx="5834380" cy="1440000"/>
         </p:xfrm>
         <a:graphic>
           <a:graphicData uri="http://schemas.openxmlformats.org/drawingml/2006/table">
@@ -5897,7 +5897,7 @@
         </p:nvGraphicFramePr>
         <p:xfrm>
           <a:off x="2374456" y="2112010"/>
-          <a:ext cx="4381500" cy="3873500"/>
+          <a:ext cx="4381500" cy="1440000"/>
         </p:xfrm>
         <a:graphic>
           <a:graphicData uri="http://schemas.openxmlformats.org/drawingml/2006/table">
@@ -7002,7 +7002,7 @@
         </p:nvGraphicFramePr>
         <p:xfrm>
           <a:off x="2222056" y="1837690"/>
-          <a:ext cx="4686300" cy="3873500"/>
+          <a:ext cx="4686300" cy="1440000"/>
         </p:xfrm>
         <a:graphic>
           <a:graphicData uri="http://schemas.openxmlformats.org/drawingml/2006/table">
@@ -8372,7 +8372,7 @@
         </p:nvGraphicFramePr>
         <p:xfrm>
           <a:off x="2627186" y="2112010"/>
-          <a:ext cx="3876040" cy="3873500"/>
+          <a:ext cx="3876040" cy="2016000"/>
         </p:xfrm>
         <a:graphic>
           <a:graphicData uri="http://schemas.openxmlformats.org/drawingml/2006/table">
@@ -11212,7 +11212,7 @@
         </p:nvGraphicFramePr>
         <p:xfrm>
           <a:off x="2122996" y="1887220"/>
-          <a:ext cx="4884420" cy="3873500"/>
+          <a:ext cx="4884420" cy="1440000"/>
         </p:xfrm>
         <a:graphic>
           <a:graphicData uri="http://schemas.openxmlformats.org/drawingml/2006/table">
@@ -13529,7 +13529,7 @@
         </p:nvGraphicFramePr>
         <p:xfrm>
           <a:off x="1886776" y="2112010"/>
-          <a:ext cx="5356860" cy="3873500"/>
+          <a:ext cx="5356860" cy="2016000"/>
         </p:xfrm>
         <a:graphic>
           <a:graphicData uri="http://schemas.openxmlformats.org/drawingml/2006/table">
@@ -15884,7 +15884,7 @@
         </p:nvGraphicFramePr>
         <p:xfrm>
           <a:off x="1829625" y="2112010"/>
-          <a:ext cx="5471160" cy="3873500"/>
+          <a:ext cx="5471160" cy="1440000"/>
         </p:xfrm>
         <a:graphic>
           <a:graphicData uri="http://schemas.openxmlformats.org/drawingml/2006/table">
@@ -16949,7 +16949,7 @@
         </p:nvGraphicFramePr>
         <p:xfrm>
           <a:off x="2319846" y="2112010"/>
-          <a:ext cx="4490720" cy="3873500"/>
+          <a:ext cx="4490720" cy="1440000"/>
         </p:xfrm>
         <a:graphic>
           <a:graphicData uri="http://schemas.openxmlformats.org/drawingml/2006/table">
@@ -19152,7 +19152,7 @@
         </p:nvGraphicFramePr>
         <p:xfrm>
           <a:off x="2597976" y="1837690"/>
-          <a:ext cx="3934460" cy="3873500"/>
+          <a:ext cx="3934460" cy="1152000"/>
         </p:xfrm>
         <a:graphic>
           <a:graphicData uri="http://schemas.openxmlformats.org/drawingml/2006/table">
